--- a/curso/pptx/S14.pptx
+++ b/curso/pptx/S14.pptx
@@ -5209,7 +5209,7 @@
                 </a:solidFill>
                 <a:latin typeface="Nunito Sans"/>
               </a:rPr>
-              <a:t>«No le hagas caso, es un friki»</a:t>
+              <a:t>“别理他，他是个怪胎”</a:t>
             </a:r>
           </a:p>
           <a:p>
@@ -5234,7 +5234,7 @@
                 </a:solidFill>
                 <a:latin typeface="Nunito Sans"/>
               </a:rPr>
-              <a:t>«Qué sabrá, si es de primero»</a:t>
+              <a:t>“他懂什么，他才一年级”</a:t>
             </a:r>
           </a:p>
           <a:p>
@@ -5259,7 +5259,7 @@
                 </a:solidFill>
                 <a:latin typeface="Nunito Sans"/>
               </a:rPr>
-              <a:t>«Tú también lo haces, así que calla»</a:t>
+              <a:t>“你也这样做，所以闭嘴”</a:t>
             </a:r>
           </a:p>
         </p:txBody>
@@ -5389,7 +5389,7 @@
                 </a:solidFill>
                 <a:latin typeface="Nunito Sans"/>
               </a:rPr>
-              <a:t>«Lo vende él: pidamos pruebas»</a:t>
+              <a:t>“是他自己在卖：我们要求拿出证据”</a:t>
             </a:r>
           </a:p>
           <a:p>
@@ -5414,7 +5414,7 @@
                 </a:solidFill>
                 <a:latin typeface="Nunito Sans"/>
               </a:rPr>
-              <a:t>«Ya nos mintió con esto: comprobémoslo»</a:t>
+              <a:t>“他以前就在这件事上骗过我们：我们来核实一下”</a:t>
             </a:r>
           </a:p>
           <a:p>
@@ -5439,7 +5439,7 @@
                 </a:solidFill>
                 <a:latin typeface="Nunito Sans"/>
               </a:rPr>
-              <a:t>«No es médico: preguntemos a un médico»</a:t>
+              <a:t>“他不是医生：我们去问医生”</a:t>
             </a:r>
           </a:p>
         </p:txBody>
@@ -7603,7 +7603,7 @@
                 </a:solidFill>
                 <a:latin typeface="Nunito Sans"/>
               </a:rPr>
-              <a:t>En latín, </a:t>
+              <a:t>在拉丁语里，</a:t>
             </a:r>
             <a:r>
               <a:rPr sz="2800" b="1">
@@ -7621,7 +7621,7 @@
                 </a:solidFill>
                 <a:latin typeface="Nunito Sans"/>
               </a:rPr>
-              <a:t> significa «contra la persona»</a:t>
+              <a:t> 的意思是“针对这个人”</a:t>
             </a:r>
           </a:p>
           <a:p>
@@ -7646,7 +7646,7 @@
                 </a:solidFill>
                 <a:latin typeface="Nunito Sans"/>
               </a:rPr>
-              <a:t>Ataca su aspecto, sus notas, su edad, su familia…</a:t>
+              <a:t>攻击他的外貌、成绩、年龄、家庭……</a:t>
             </a:r>
           </a:p>
           <a:p>
@@ -7671,7 +7671,7 @@
                 </a:solidFill>
                 <a:latin typeface="Nunito Sans"/>
               </a:rPr>
-              <a:t>La idea se queda </a:t>
+              <a:t>那个想法</a:t>
             </a:r>
             <a:r>
               <a:rPr sz="2800" b="1">
@@ -7680,7 +7680,7 @@
                 </a:solidFill>
                 <a:latin typeface="Nunito Sans"/>
               </a:rPr>
-              <a:t>sin responder</a:t>
+              <a:t>没有得到回应</a:t>
             </a:r>
           </a:p>
           <a:p>
@@ -7705,7 +7705,7 @@
                 </a:solidFill>
                 <a:latin typeface="Nunito Sans"/>
               </a:rPr>
-              <a:t>Pregunta: </a:t>
+              <a:t>要问：</a:t>
             </a:r>
             <a:r>
               <a:rPr sz="2800" b="1">
@@ -7714,7 +7714,7 @@
                 </a:solidFill>
                 <a:latin typeface="Nunito Sans"/>
               </a:rPr>
-              <a:t>¿qué tiene que ver quién lo dice con la idea?</a:t>
+              <a:t>说话的人是谁，和这个想法有什么关系？</a:t>
             </a:r>
           </a:p>
         </p:txBody>
@@ -7948,7 +7948,7 @@
                 </a:solidFill>
                 <a:latin typeface="Nunito Sans"/>
               </a:rPr>
-              <a:t>En latín, </a:t>
+              <a:t>在拉丁语里，</a:t>
             </a:r>
             <a:r>
               <a:rPr sz="2800" b="1">
@@ -7966,7 +7966,7 @@
                 </a:solidFill>
                 <a:latin typeface="Nunito Sans"/>
               </a:rPr>
-              <a:t> significa «tú también»</a:t>
+              <a:t> 的意思是“你也一样”</a:t>
             </a:r>
           </a:p>
           <a:p>
@@ -7991,7 +7991,7 @@
                 </a:solidFill>
                 <a:latin typeface="Nunito Sans"/>
               </a:rPr>
-              <a:t>Es un tipo de ataque a la persona</a:t>
+              <a:t>它是攻击个人的一种</a:t>
             </a:r>
           </a:p>
           <a:p>
@@ -8016,7 +8016,7 @@
                 </a:solidFill>
                 <a:latin typeface="Nunito Sans"/>
               </a:rPr>
-              <a:t>Que alguien no cumpla un consejo no lo hace falso</a:t>
+              <a:t>有人没有做到一个建议，并不会让这个建议变成假的</a:t>
             </a:r>
           </a:p>
         </p:txBody>

--- a/curso/pptx/S14.pptx
+++ b/curso/pptx/S14.pptx
@@ -4130,7 +4130,7 @@
                 </a:solidFill>
                 <a:latin typeface="Nunito Sans"/>
               </a:rPr>
-              <a:t>奥马尔提议把课间休息延长五分钟。凯文：“你有什么资格提议，你是新来的，连体育馆在哪儿都不知道。”</a:t>
+              <a:t>一个男孩提议把课间休息延长五分钟。一个同学：“你有什么资格提议，你是新来的，连体育馆在哪儿都不知道。”</a:t>
             </a:r>
           </a:p>
         </p:txBody>
@@ -4178,7 +4178,7 @@
                 </a:solidFill>
                 <a:latin typeface="Nunito Sans"/>
               </a:rPr>
-              <a:t>奥马尔提议什么？延长课间休息。</a:t>
+              <a:t>这个男孩提议什么？延长课间休息。</a:t>
             </a:r>
           </a:p>
           <a:p>
@@ -4203,7 +4203,7 @@
                 </a:solidFill>
                 <a:latin typeface="Nunito Sans"/>
               </a:rPr>
-              <a:t>凯文回答了什么？他说的是奥马尔，不是课间休息。</a:t>
+              <a:t>这个同学回答了什么？他说的是这个男孩，不是课间休息。</a:t>
             </a:r>
           </a:p>
           <a:p>
@@ -4253,7 +4253,7 @@
                 </a:solidFill>
                 <a:latin typeface="Nunito Sans"/>
               </a:rPr>
-              <a:t>结论：攻击个人。奥马尔的提议依然没有得到回应。</a:t>
+              <a:t>结论：攻击个人。这个男孩的提议依然没有得到回应。</a:t>
             </a:r>
           </a:p>
         </p:txBody>
@@ -4439,7 +4439,7 @@
                 </a:solidFill>
                 <a:latin typeface="Nunito Sans"/>
               </a:rPr>
-              <a:t>雅斯敏的妈妈：“别玩手机了，你已经玩了三个小时。”雅斯敏：“你还说我呢，你不是一直在看微信（WhatsApp）吗！”</a:t>
+              <a:t>一个女孩的妈妈：“别玩手机了，你已经玩了三个小时。”这个女孩：“你还说我呢，你不是一直在看微信（WhatsApp）吗！”</a:t>
             </a:r>
           </a:p>
         </p:txBody>
@@ -4512,7 +4512,7 @@
                 </a:solidFill>
                 <a:latin typeface="Nunito Sans"/>
               </a:rPr>
-              <a:t>雅斯敏回答了什么？她妈妈也经常用手机。</a:t>
+              <a:t>这个女孩回答了什么？她妈妈也经常用手机。</a:t>
             </a:r>
           </a:p>
           <a:p>
@@ -5625,7 +5625,7 @@
                 </a:solidFill>
                 <a:latin typeface="Nunito Sans"/>
               </a:rPr>
-              <a:t>班长奥马尔在班上要求：“大家要遵守发言的顺序。”后来他却打断所有人。奈亚拉：“你要求大家遵守发言顺序，你自己却不遵守。”</a:t>
+              <a:t>一个当班长的男孩在班上要求：“大家要遵守发言的顺序。”后来他却打断所有人。一个女孩：“你要求大家遵守发言顺序，你自己却不遵守。”</a:t>
             </a:r>
           </a:p>
         </p:txBody>
@@ -5698,7 +5698,7 @@
                 </a:solidFill>
                 <a:latin typeface="Nunito Sans"/>
               </a:rPr>
-              <a:t>奈亚拉没有说这条规矩不好。她也没有用它来逃避遵守。</a:t>
+              <a:t>这个女孩没有说这条规矩不好。她也没有用它来逃避遵守。</a:t>
             </a:r>
           </a:p>
           <a:p>
@@ -5741,7 +5741,7 @@
                 </a:solidFill>
                 <a:latin typeface="Nunito Sans"/>
               </a:rPr>
-              <a:t>：奥马尔要求别人做的事，他自己不做。</a:t>
+              <a:t>：这个男孩要求别人做的事，他自己不做。</a:t>
             </a:r>
           </a:p>
           <a:p>
@@ -7226,7 +7226,7 @@
                 </a:solidFill>
                 <a:latin typeface="Nunito Sans"/>
               </a:rPr>
-              <a:t>奥马尔提议把课间休息延长五分钟。凯文回答：“你有什么资格提议，你是新来的，连体育馆在哪儿都不知道。”</a:t>
+              <a:t>一个男孩提议把课间休息延长五分钟。一个同学回答：“你有什么资格提议，你是新来的，连体育馆在哪儿都不知道。”</a:t>
             </a:r>
           </a:p>
         </p:txBody>
@@ -7265,7 +7265,7 @@
                 </a:solidFill>
                 <a:latin typeface="Nunito Sans"/>
               </a:rPr>
-              <a:t>凯文说了奥马尔的想法好不好吗？</a:t>
+              <a:t>这个同学说了这个男孩的想法好不好吗？</a:t>
             </a:r>
           </a:p>
         </p:txBody>
